--- a/8.0_Machine Learning/class/my_class/ml_class_notes/class_3_Logistic_regression_class.pptx
+++ b/8.0_Machine Learning/class/my_class/ml_class_notes/class_3_Logistic_regression_class.pptx
@@ -7620,7 +7620,7 @@
         </p:blipFill>
         <p:spPr>
           <a:xfrm>
-            <a:off x="-1" y="1"/>
+            <a:off x="-1" y="12701"/>
             <a:ext cx="4635315" cy="6857999"/>
           </a:xfrm>
           <a:prstGeom prst="rect">
@@ -19085,7 +19085,7 @@
         <p:spPr>
           <a:xfrm>
             <a:off x="559904" y="566678"/>
-            <a:ext cx="11072191" cy="3784600"/>
+            <a:ext cx="11072191" cy="3507740"/>
           </a:xfrm>
           <a:prstGeom prst="rect">
             <a:avLst/>
@@ -19283,9 +19283,6 @@
             </a:endParaRPr>
           </a:p>
           <a:p>
-            <a:br>
-              <a:rPr lang="en-US" dirty="0"/>
-            </a:br>
             <a:endParaRPr lang="en-IN" dirty="0"/>
           </a:p>
         </p:txBody>

--- a/8.0_Machine Learning/class/my_class/ml_class_notes/class_3_Logistic_regression_class.pptx
+++ b/8.0_Machine Learning/class/my_class/ml_class_notes/class_3_Logistic_regression_class.pptx
@@ -18,8 +18,8 @@
     <p:sldId id="301" r:id="rId13"/>
     <p:sldId id="299" r:id="rId14"/>
     <p:sldId id="285" r:id="rId15"/>
-    <p:sldId id="288" r:id="rId16"/>
-    <p:sldId id="312" r:id="rId17"/>
+    <p:sldId id="312" r:id="rId16"/>
+    <p:sldId id="288" r:id="rId17"/>
     <p:sldId id="313" r:id="rId18"/>
     <p:sldId id="300" r:id="rId19"/>
     <p:sldId id="305" r:id="rId20"/>
@@ -1675,7 +1675,7 @@
     </dsp:sp>
     <dsp:sp modelId="{7907DE3C-8D09-497B-9B0A-FF8CB0AF7D0E}">
       <dsp:nvSpPr>
-        <dsp:cNvPr id="4" name="Rectangles 3"/>
+        <dsp:cNvPr id="4" name="Rectangle 3"/>
         <dsp:cNvSpPr/>
       </dsp:nvSpPr>
       <dsp:spPr bwMode="white">
@@ -1862,7 +1862,7 @@
     </dsp:sp>
     <dsp:sp modelId="{B46C84B0-B83D-4677-BEA9-8DD2B3EADAD0}">
       <dsp:nvSpPr>
-        <dsp:cNvPr id="7" name="Rectangles 6"/>
+        <dsp:cNvPr id="7" name="Rectangle 6"/>
         <dsp:cNvSpPr/>
       </dsp:nvSpPr>
       <dsp:spPr bwMode="white">
@@ -2052,7 +2052,7 @@
     </dsp:sp>
     <dsp:sp modelId="{1E10BA9A-DEA4-4075-9A03-B4C7CA82D359}">
       <dsp:nvSpPr>
-        <dsp:cNvPr id="10" name="Rectangles 9"/>
+        <dsp:cNvPr id="10" name="Rectangle 9"/>
         <dsp:cNvSpPr/>
       </dsp:nvSpPr>
       <dsp:spPr bwMode="white">
@@ -2239,7 +2239,7 @@
     </dsp:sp>
     <dsp:sp modelId="{BF6E417D-E404-41E0-B6B9-4676170C39B7}">
       <dsp:nvSpPr>
-        <dsp:cNvPr id="13" name="Rectangles 12"/>
+        <dsp:cNvPr id="13" name="Rectangle 12"/>
         <dsp:cNvSpPr/>
       </dsp:nvSpPr>
       <dsp:spPr bwMode="white">
@@ -2426,7 +2426,7 @@
     </dsp:sp>
     <dsp:sp modelId="{DB747E33-537E-454F-8C2F-F67E1FA7924D}">
       <dsp:nvSpPr>
-        <dsp:cNvPr id="16" name="Rectangles 15"/>
+        <dsp:cNvPr id="16" name="Rectangle 15"/>
         <dsp:cNvSpPr/>
       </dsp:nvSpPr>
       <dsp:spPr bwMode="white">
@@ -2613,7 +2613,7 @@
     </dsp:sp>
     <dsp:sp modelId="{E7836ADD-9EA4-4DF3-8502-89D894B85155}">
       <dsp:nvSpPr>
-        <dsp:cNvPr id="19" name="Rectangles 18"/>
+        <dsp:cNvPr id="19" name="Rectangle 18"/>
         <dsp:cNvSpPr/>
       </dsp:nvSpPr>
       <dsp:spPr bwMode="white">
@@ -2800,7 +2800,7 @@
     </dsp:sp>
     <dsp:sp modelId="{FA604DC8-01F6-4A09-8F04-1F6B7FD34130}">
       <dsp:nvSpPr>
-        <dsp:cNvPr id="22" name="Rectangles 21"/>
+        <dsp:cNvPr id="22" name="Rectangle 21"/>
         <dsp:cNvSpPr/>
       </dsp:nvSpPr>
       <dsp:spPr bwMode="white">
@@ -8082,7 +8082,7 @@
         <p:spPr>
           <a:xfrm>
             <a:off x="879475" y="221615"/>
-            <a:ext cx="7818755" cy="3271520"/>
+            <a:ext cx="7818755" cy="2976880"/>
           </a:xfrm>
           <a:prstGeom prst="rect">
             <a:avLst/>
@@ -8383,40 +8383,6 @@
                 <a:cs typeface="Arial" panose="020B0604020202020204" pitchFamily="34" charset="0"/>
               </a:rPr>
               <a:t>AUC-ROC</a:t>
-            </a:r>
-            <a:endParaRPr sz="2000" b="0" i="0">
-              <a:solidFill>
-                <a:srgbClr val="272528"/>
-              </a:solidFill>
-              <a:latin typeface="Arial" panose="020B0604020202020204" pitchFamily="34" charset="0"/>
-              <a:ea typeface="Inter"/>
-              <a:cs typeface="Arial" panose="020B0604020202020204" pitchFamily="34" charset="0"/>
-            </a:endParaRPr>
-          </a:p>
-          <a:p>
-            <a:pPr lvl="2" indent="0">
-              <a:lnSpc>
-                <a:spcPts val="1800"/>
-              </a:lnSpc>
-              <a:spcBef>
-                <a:spcPct val="0"/>
-              </a:spcBef>
-              <a:spcAft>
-                <a:spcPts val="500"/>
-              </a:spcAft>
-              <a:buFont typeface="Arial" panose="020B0604020202020204"/>
-              <a:buChar char="◦"/>
-            </a:pPr>
-            <a:r>
-              <a:rPr sz="2000" b="0" i="0">
-                <a:solidFill>
-                  <a:srgbClr val="272528"/>
-                </a:solidFill>
-                <a:latin typeface="Arial" panose="020B0604020202020204" pitchFamily="34" charset="0"/>
-                <a:ea typeface="Inter"/>
-                <a:cs typeface="Arial" panose="020B0604020202020204" pitchFamily="34" charset="0"/>
-              </a:rPr>
-              <a:t>Log Loss</a:t>
             </a:r>
             <a:endParaRPr sz="2000" b="0" i="0">
               <a:solidFill>
@@ -8903,145 +8869,6 @@
 </file>
 
 <file path=ppt/slides/slide14.xml><?xml version="1.0" encoding="utf-8"?>
-<p:sld xmlns:a="http://schemas.openxmlformats.org/drawingml/2006/main" xmlns:r="http://schemas.openxmlformats.org/officeDocument/2006/relationships" xmlns:p="http://schemas.openxmlformats.org/presentationml/2006/main">
-  <p:cSld>
-    <p:spTree>
-      <p:nvGrpSpPr>
-        <p:cNvPr id="1" name=""/>
-        <p:cNvGrpSpPr/>
-        <p:nvPr/>
-      </p:nvGrpSpPr>
-      <p:grpSpPr>
-        <a:xfrm>
-          <a:off x="0" y="0"/>
-          <a:ext cx="0" cy="0"/>
-          <a:chOff x="0" y="0"/>
-          <a:chExt cx="0" cy="0"/>
-        </a:xfrm>
-      </p:grpSpPr>
-      <p:sp>
-        <p:nvSpPr>
-          <p:cNvPr id="3" name="TextBox 2"/>
-          <p:cNvSpPr txBox="1"/>
-          <p:nvPr/>
-        </p:nvSpPr>
-        <p:spPr>
-          <a:xfrm>
-            <a:off x="583924" y="5729766"/>
-            <a:ext cx="11392728" cy="646331"/>
-          </a:xfrm>
-          <a:prstGeom prst="rect">
-            <a:avLst/>
-          </a:prstGeom>
-          <a:noFill/>
-        </p:spPr>
-        <p:txBody>
-          <a:bodyPr wrap="square">
-            <a:spAutoFit/>
-          </a:bodyPr>
-          <a:lstStyle/>
-          <a:p>
-            <a:r>
-              <a:rPr lang="en-IN" dirty="0"/>
-              <a:t>https://www.analyticsvidhya.com/blog/2021/07/metrics-to-evaluate-your-classification-model-to-take-the-right-decisions/</a:t>
-            </a:r>
-            <a:endParaRPr lang="en-IN" dirty="0"/>
-          </a:p>
-        </p:txBody>
-      </p:sp>
-      <p:sp>
-        <p:nvSpPr>
-          <p:cNvPr id="5" name="TextBox 4"/>
-          <p:cNvSpPr txBox="1"/>
-          <p:nvPr/>
-        </p:nvSpPr>
-        <p:spPr>
-          <a:xfrm>
-            <a:off x="742950" y="297237"/>
-            <a:ext cx="6097656" cy="369332"/>
-          </a:xfrm>
-          <a:prstGeom prst="rect">
-            <a:avLst/>
-          </a:prstGeom>
-          <a:noFill/>
-        </p:spPr>
-        <p:txBody>
-          <a:bodyPr wrap="square">
-            <a:spAutoFit/>
-          </a:bodyPr>
-          <a:lstStyle/>
-          <a:p>
-            <a:pPr algn="l"/>
-            <a:r>
-              <a:rPr lang="en-US" b="1" i="0" dirty="0">
-                <a:solidFill>
-                  <a:srgbClr val="FF0000"/>
-                </a:solidFill>
-                <a:effectLst/>
-                <a:latin typeface="Inter"/>
-              </a:rPr>
-              <a:t>Metrics to Evaluate your Classification Model</a:t>
-            </a:r>
-            <a:endParaRPr lang="en-US" b="1" i="0" dirty="0">
-              <a:solidFill>
-                <a:srgbClr val="FF0000"/>
-              </a:solidFill>
-              <a:effectLst/>
-              <a:latin typeface="Inter"/>
-            </a:endParaRPr>
-          </a:p>
-        </p:txBody>
-      </p:sp>
-      <p:pic>
-        <p:nvPicPr>
-          <p:cNvPr id="5122" name="Picture 2" descr="6 Useful Metrics to Evaluate Binary Classification Models – The Digital Skye"/>
-          <p:cNvPicPr>
-            <a:picLocks noChangeAspect="1" noChangeArrowheads="1"/>
-          </p:cNvPicPr>
-          <p:nvPr/>
-        </p:nvPicPr>
-        <p:blipFill>
-          <a:blip r:embed="rId1">
-            <a:extLst>
-              <a:ext uri="{28A0092B-C50C-407E-A947-70E740481C1C}">
-                <a14:useLocalDpi xmlns:a14="http://schemas.microsoft.com/office/drawing/2010/main" val="0"/>
-              </a:ext>
-            </a:extLst>
-          </a:blip>
-          <a:srcRect/>
-          <a:stretch>
-            <a:fillRect/>
-          </a:stretch>
-        </p:blipFill>
-        <p:spPr bwMode="auto">
-          <a:xfrm>
-            <a:off x="1764030" y="1633538"/>
-            <a:ext cx="9734550" cy="3362325"/>
-          </a:xfrm>
-          <a:prstGeom prst="rect">
-            <a:avLst/>
-          </a:prstGeom>
-          <a:noFill/>
-          <a:extLst>
-            <a:ext uri="{909E8E84-426E-40DD-AFC4-6F175D3DCCD1}">
-              <a14:hiddenFill xmlns:a14="http://schemas.microsoft.com/office/drawing/2010/main">
-                <a:solidFill>
-                  <a:srgbClr val="FFFFFF"/>
-                </a:solidFill>
-              </a14:hiddenFill>
-            </a:ext>
-          </a:extLst>
-        </p:spPr>
-      </p:pic>
-    </p:spTree>
-  </p:cSld>
-  <p:clrMapOvr>
-    <a:masterClrMapping/>
-  </p:clrMapOvr>
-</p:sld>
-</file>
-
-<file path=ppt/slides/slide15.xml><?xml version="1.0" encoding="utf-8"?>
 <p:sld xmlns:a="http://schemas.openxmlformats.org/drawingml/2006/main" xmlns:r="http://schemas.openxmlformats.org/officeDocument/2006/relationships" xmlns:p="http://schemas.openxmlformats.org/presentationml/2006/main">
   <p:cSld>
     <p:spTree>
@@ -9117,6 +8944,145 @@
           <a:prstGeom prst="rect">
             <a:avLst/>
           </a:prstGeom>
+        </p:spPr>
+      </p:pic>
+    </p:spTree>
+  </p:cSld>
+  <p:clrMapOvr>
+    <a:masterClrMapping/>
+  </p:clrMapOvr>
+</p:sld>
+</file>
+
+<file path=ppt/slides/slide15.xml><?xml version="1.0" encoding="utf-8"?>
+<p:sld xmlns:a="http://schemas.openxmlformats.org/drawingml/2006/main" xmlns:r="http://schemas.openxmlformats.org/officeDocument/2006/relationships" xmlns:p="http://schemas.openxmlformats.org/presentationml/2006/main">
+  <p:cSld>
+    <p:spTree>
+      <p:nvGrpSpPr>
+        <p:cNvPr id="1" name=""/>
+        <p:cNvGrpSpPr/>
+        <p:nvPr/>
+      </p:nvGrpSpPr>
+      <p:grpSpPr>
+        <a:xfrm>
+          <a:off x="0" y="0"/>
+          <a:ext cx="0" cy="0"/>
+          <a:chOff x="0" y="0"/>
+          <a:chExt cx="0" cy="0"/>
+        </a:xfrm>
+      </p:grpSpPr>
+      <p:sp>
+        <p:nvSpPr>
+          <p:cNvPr id="3" name="TextBox 2"/>
+          <p:cNvSpPr txBox="1"/>
+          <p:nvPr/>
+        </p:nvSpPr>
+        <p:spPr>
+          <a:xfrm>
+            <a:off x="583924" y="5729766"/>
+            <a:ext cx="11392728" cy="646331"/>
+          </a:xfrm>
+          <a:prstGeom prst="rect">
+            <a:avLst/>
+          </a:prstGeom>
+          <a:noFill/>
+        </p:spPr>
+        <p:txBody>
+          <a:bodyPr wrap="square">
+            <a:spAutoFit/>
+          </a:bodyPr>
+          <a:lstStyle/>
+          <a:p>
+            <a:r>
+              <a:rPr lang="en-IN" dirty="0"/>
+              <a:t>https://www.analyticsvidhya.com/blog/2021/07/metrics-to-evaluate-your-classification-model-to-take-the-right-decisions/</a:t>
+            </a:r>
+            <a:endParaRPr lang="en-IN" dirty="0"/>
+          </a:p>
+        </p:txBody>
+      </p:sp>
+      <p:sp>
+        <p:nvSpPr>
+          <p:cNvPr id="5" name="TextBox 4"/>
+          <p:cNvSpPr txBox="1"/>
+          <p:nvPr/>
+        </p:nvSpPr>
+        <p:spPr>
+          <a:xfrm>
+            <a:off x="742950" y="297237"/>
+            <a:ext cx="6097656" cy="369332"/>
+          </a:xfrm>
+          <a:prstGeom prst="rect">
+            <a:avLst/>
+          </a:prstGeom>
+          <a:noFill/>
+        </p:spPr>
+        <p:txBody>
+          <a:bodyPr wrap="square">
+            <a:spAutoFit/>
+          </a:bodyPr>
+          <a:lstStyle/>
+          <a:p>
+            <a:pPr algn="l"/>
+            <a:r>
+              <a:rPr lang="en-US" b="1" i="0" dirty="0">
+                <a:solidFill>
+                  <a:srgbClr val="FF0000"/>
+                </a:solidFill>
+                <a:effectLst/>
+                <a:latin typeface="Inter"/>
+              </a:rPr>
+              <a:t>Metrics to Evaluate your Classification Model</a:t>
+            </a:r>
+            <a:endParaRPr lang="en-US" b="1" i="0" dirty="0">
+              <a:solidFill>
+                <a:srgbClr val="FF0000"/>
+              </a:solidFill>
+              <a:effectLst/>
+              <a:latin typeface="Inter"/>
+            </a:endParaRPr>
+          </a:p>
+        </p:txBody>
+      </p:sp>
+      <p:pic>
+        <p:nvPicPr>
+          <p:cNvPr id="5122" name="Picture 2" descr="6 Useful Metrics to Evaluate Binary Classification Models – The Digital Skye"/>
+          <p:cNvPicPr>
+            <a:picLocks noChangeAspect="1" noChangeArrowheads="1"/>
+          </p:cNvPicPr>
+          <p:nvPr/>
+        </p:nvPicPr>
+        <p:blipFill>
+          <a:blip r:embed="rId1">
+            <a:extLst>
+              <a:ext uri="{28A0092B-C50C-407E-A947-70E740481C1C}">
+                <a14:useLocalDpi xmlns:a14="http://schemas.microsoft.com/office/drawing/2010/main" val="0"/>
+              </a:ext>
+            </a:extLst>
+          </a:blip>
+          <a:srcRect/>
+          <a:stretch>
+            <a:fillRect/>
+          </a:stretch>
+        </p:blipFill>
+        <p:spPr bwMode="auto">
+          <a:xfrm>
+            <a:off x="1764030" y="1633538"/>
+            <a:ext cx="9734550" cy="3362325"/>
+          </a:xfrm>
+          <a:prstGeom prst="rect">
+            <a:avLst/>
+          </a:prstGeom>
+          <a:noFill/>
+          <a:extLst>
+            <a:ext uri="{909E8E84-426E-40DD-AFC4-6F175D3DCCD1}">
+              <a14:hiddenFill xmlns:a14="http://schemas.microsoft.com/office/drawing/2010/main">
+                <a:solidFill>
+                  <a:srgbClr val="FFFFFF"/>
+                </a:solidFill>
+              </a14:hiddenFill>
+            </a:ext>
+          </a:extLst>
         </p:spPr>
       </p:pic>
     </p:spTree>
